--- a/Dev/Caret.ConverterTests/samples/powerpoint-review.pptx
+++ b/Dev/Caret.ConverterTests/samples/powerpoint-review.pptx
@@ -2,21 +2,133 @@
 <file path=ppt/presentation.xml><?xml version="1.0" encoding="utf-8"?>
 <p:presentation xmlns:p="http://schemas.openxmlformats.org/presentationml/2006/main">
   <p:sldMasterIdLst>
-    <p:sldMasterId xmlns:r="http://schemas.openxmlformats.org/officeDocument/2006/relationships" id="2147483648" r:id="R8de8f0dd156646f8"/>
+    <p:sldMasterId xmlns:r="http://schemas.openxmlformats.org/officeDocument/2006/relationships" id="2147483648" r:id="Rc62b4103cfd345b8"/>
   </p:sldMasterIdLst>
   <p:notesMasterIdLst>
-    <p:notesMasterId xmlns:r="http://schemas.openxmlformats.org/officeDocument/2006/relationships" r:id="Ra801b01dc520432b"/>
+    <p:notesMasterId xmlns:r="http://schemas.openxmlformats.org/officeDocument/2006/relationships" r:id="R724e0d88e9d547d4"/>
   </p:notesMasterIdLst>
   <p:sldIdLst>
-    <p:sldId xmlns:r="http://schemas.openxmlformats.org/officeDocument/2006/relationships" id="256" r:id="Ree285e3b452a4a1c"/>
-    <p:sldId xmlns:r="http://schemas.openxmlformats.org/officeDocument/2006/relationships" id="257" r:id="R9165b527056040b7"/>
-    <p:sldId xmlns:r="http://schemas.openxmlformats.org/officeDocument/2006/relationships" id="258" r:id="Rfeb90ce6a4064e0d"/>
-    <p:sldId xmlns:r="http://schemas.openxmlformats.org/officeDocument/2006/relationships" id="259" r:id="R64cbb730d48f4a2c"/>
-    <p:sldId xmlns:r="http://schemas.openxmlformats.org/officeDocument/2006/relationships" id="260" r:id="R5c8c9cabac124aca"/>
+    <p:sldId xmlns:r="http://schemas.openxmlformats.org/officeDocument/2006/relationships" id="256" r:id="R37f0fc27ebf148c7"/>
+    <p:sldId xmlns:r="http://schemas.openxmlformats.org/officeDocument/2006/relationships" id="257" r:id="R92b3d39ae7ab47a4"/>
+    <p:sldId xmlns:r="http://schemas.openxmlformats.org/officeDocument/2006/relationships" id="258" r:id="Rf518078800b54c18"/>
+    <p:sldId xmlns:r="http://schemas.openxmlformats.org/officeDocument/2006/relationships" id="259" r:id="Rbe08440b5cef47f1"/>
+    <p:sldId xmlns:r="http://schemas.openxmlformats.org/officeDocument/2006/relationships" id="260" r:id="Re33e7e96d9a048d6"/>
+    <p:sldId xmlns:r="http://schemas.openxmlformats.org/officeDocument/2006/relationships" id="261" r:id="R4c119e7d279048f2"/>
   </p:sldIdLst>
   <p:sldSz cx="9144000" cy="6858000" type="screen4x3"/>
   <p:notesSz cx="6858000" cy="9144000"/>
 </p:presentation>
+</file>
+
+<file path=ppt/commentAuthors.xml><?xml version="1.0" encoding="utf-8"?>
+<p:cmAuthorLst xmlns:p="http://schemas.openxmlformats.org/presentationml/2006/main">
+  <p:cmAuthor id="0" name="Reviewer" initials="R" lastIdx="1" clrIdx="0"/>
+</p:cmAuthorLst>
+</file>
+
+<file path=ppt/comments/comment1.xml><?xml version="1.0" encoding="utf-8"?>
+<p:cmLst xmlns:p="http://schemas.openxmlformats.org/presentationml/2006/main">
+  <p:cm authorId="0" dt="2024-05-06T09:00:00" idx="1">
+    <p:pos x="10" y="10"/>
+    <p:text>Check the Q3 figure.</p:text>
+  </p:cm>
+</p:cmLst>
+</file>
+
+<file path=ppt/graphics/colors1.xml><?xml version="1.0" encoding="utf-8"?>
+<dgm:colorsDef xmlns:dgm="http://schemas.openxmlformats.org/drawingml/2006/diagram" uniqueId="urn:test/colors">
+  <dgm:title val=""/>
+  <dgm:desc val=""/>
+  <dgm:catLst/>
+  <dgm:styleLbl name="node0"/>
+</dgm:colorsDef>
+</file>
+
+<file path=ppt/graphics/data1.xml><?xml version="1.0" encoding="utf-8"?>
+<dgm:dataModel xmlns:dgm="http://schemas.openxmlformats.org/drawingml/2006/diagram">
+  <dgm:ptLst>
+    <dgm:pt modelId="{00000000-0000-0000-0000-000000000001}" type="doc">
+      <dgm:prSet/>
+      <dgm:spPr/>
+      <dgm:t>
+        <a:bodyPr xmlns:a="http://schemas.openxmlformats.org/drawingml/2006/main"/>
+        <a:lstStyle xmlns:a="http://schemas.openxmlformats.org/drawingml/2006/main"/>
+        <a:p xmlns:a="http://schemas.openxmlformats.org/drawingml/2006/main">
+          <a:endParaRPr lang="en-US"/>
+        </a:p>
+      </dgm:t>
+    </dgm:pt>
+    <dgm:pt modelId="{00000000-0000-0000-0000-000000000002}">
+      <dgm:prSet/>
+      <dgm:spPr/>
+      <dgm:t>
+        <a:bodyPr xmlns:a="http://schemas.openxmlformats.org/drawingml/2006/main"/>
+        <a:lstStyle xmlns:a="http://schemas.openxmlformats.org/drawingml/2006/main"/>
+        <a:p xmlns:a="http://schemas.openxmlformats.org/drawingml/2006/main">
+          <a:r>
+            <a:t>Plan</a:t>
+          </a:r>
+        </a:p>
+      </dgm:t>
+    </dgm:pt>
+    <dgm:pt modelId="{00000000-0000-0000-0000-000000000003}">
+      <dgm:prSet/>
+      <dgm:spPr/>
+      <dgm:t>
+        <a:bodyPr xmlns:a="http://schemas.openxmlformats.org/drawingml/2006/main"/>
+        <a:lstStyle xmlns:a="http://schemas.openxmlformats.org/drawingml/2006/main"/>
+        <a:p xmlns:a="http://schemas.openxmlformats.org/drawingml/2006/main">
+          <a:r>
+            <a:t>Build</a:t>
+          </a:r>
+        </a:p>
+      </dgm:t>
+    </dgm:pt>
+    <dgm:pt modelId="{00000000-0000-0000-0000-000000000004}">
+      <dgm:prSet/>
+      <dgm:spPr/>
+      <dgm:t>
+        <a:bodyPr xmlns:a="http://schemas.openxmlformats.org/drawingml/2006/main"/>
+        <a:lstStyle xmlns:a="http://schemas.openxmlformats.org/drawingml/2006/main"/>
+        <a:p xmlns:a="http://schemas.openxmlformats.org/drawingml/2006/main">
+          <a:r>
+            <a:t>Test it first</a:t>
+          </a:r>
+        </a:p>
+      </dgm:t>
+    </dgm:pt>
+  </dgm:ptLst>
+  <dgm:cxnLst>
+    <dgm:cxn modelId="{00000000-0000-0000-0000-000000000011}" srcId="{00000000-0000-0000-0000-000000000001}" destId="{00000000-0000-0000-0000-000000000002}" srcOrd="0" destOrd="0"/>
+    <dgm:cxn modelId="{00000000-0000-0000-0000-000000000012}" srcId="{00000000-0000-0000-0000-000000000001}" destId="{00000000-0000-0000-0000-000000000003}" srcOrd="1" destOrd="0"/>
+    <dgm:cxn modelId="{00000000-0000-0000-0000-000000000013}" srcId="{00000000-0000-0000-0000-000000000003}" destId="{00000000-0000-0000-0000-000000000004}" srcOrd="0" destOrd="0"/>
+  </dgm:cxnLst>
+</dgm:dataModel>
+</file>
+
+<file path=ppt/graphics/layout1.xml><?xml version="1.0" encoding="utf-8"?>
+<dgm:layoutDef xmlns:dgm="http://schemas.openxmlformats.org/drawingml/2006/diagram" uniqueId="urn:test/layout">
+  <dgm:title val=""/>
+  <dgm:desc val=""/>
+  <dgm:catLst/>
+  <dgm:sampData/>
+  <dgm:styleData/>
+  <dgm:clrData/>
+  <dgm:layoutNode/>
+</dgm:layoutDef>
+</file>
+
+<file path=ppt/graphics/quickStyle1.xml><?xml version="1.0" encoding="utf-8"?>
+<dgm:styleDef xmlns:dgm="http://schemas.openxmlformats.org/drawingml/2006/diagram" uniqueId="urn:test/style">
+  <dgm:title val=""/>
+  <dgm:desc val=""/>
+  <dgm:catLst/>
+  <dgm:scene3d>
+    <a:camera xmlns:a="http://schemas.openxmlformats.org/drawingml/2006/main" prst="orthographicFront"/>
+    <a:lightRig xmlns:a="http://schemas.openxmlformats.org/drawingml/2006/main" rig="threePt" dir="t"/>
+  </dgm:scene3d>
+  <dgm:styleLbl name="node0"/>
+</dgm:styleDef>
 </file>
 
 <file path=ppt/notesMasters/notesMaster1.xml><?xml version="1.0" encoding="utf-8"?>
@@ -229,9 +341,152 @@
   </p:cSld>
   <p:clrMap bg1="lt1" tx1="dk1" bg2="lt2" tx2="dk2" accent1="accent1" accent2="accent2" accent3="accent3" accent4="accent4" accent5="accent5" accent6="accent6" hlink="hlink" folHlink="folHlink"/>
   <p:sldLayoutIdLst>
-    <p:sldLayoutId xmlns:r="http://schemas.openxmlformats.org/officeDocument/2006/relationships" id="2147483649" r:id="R13c6d14f49dc4055"/>
+    <p:sldLayoutId xmlns:r="http://schemas.openxmlformats.org/officeDocument/2006/relationships" id="2147483649" r:id="R6bb53151cbb84a5a"/>
   </p:sldLayoutIdLst>
 </p:sldMaster>
+</file>
+
+<file path=ppt/slides/charts/chart1.xml><?xml version="1.0" encoding="utf-8"?>
+<c:chartSpace xmlns:c="http://schemas.openxmlformats.org/drawingml/2006/chart">
+  <c:chart>
+    <c:title>
+      <c:tx>
+        <c:rich>
+          <a:bodyPr xmlns:a="http://schemas.openxmlformats.org/drawingml/2006/main"/>
+          <a:lstStyle xmlns:a="http://schemas.openxmlformats.org/drawingml/2006/main"/>
+          <a:p xmlns:a="http://schemas.openxmlformats.org/drawingml/2006/main">
+            <a:r>
+              <a:t>Sales by region</a:t>
+            </a:r>
+          </a:p>
+        </c:rich>
+      </c:tx>
+    </c:title>
+    <c:plotArea>
+      <c:layout/>
+      <c:barChart>
+        <c:barDir val="col"/>
+        <c:grouping val="clustered"/>
+        <c:ser>
+          <c:idx val="0"/>
+          <c:order val="0"/>
+          <c:tx>
+            <c:strRef>
+              <c:f>Sheet1!$B$1</c:f>
+              <c:strCache>
+                <c:ptCount val="1"/>
+                <c:pt idx="0">
+                  <c:v>2023</c:v>
+                </c:pt>
+              </c:strCache>
+            </c:strRef>
+          </c:tx>
+          <c:cat>
+            <c:strRef>
+              <c:f>Sheet1!$A$2:$A$4</c:f>
+              <c:strCache>
+                <c:ptCount val="3"/>
+                <c:pt idx="0">
+                  <c:v>North</c:v>
+                </c:pt>
+                <c:pt idx="1">
+                  <c:v>South</c:v>
+                </c:pt>
+                <c:pt idx="2">
+                  <c:v>East</c:v>
+                </c:pt>
+              </c:strCache>
+            </c:strRef>
+          </c:cat>
+          <c:val>
+            <c:numRef>
+              <c:f>Sheet1!$B$2:$B$4</c:f>
+              <c:numCache>
+                <c:formatCode>General</c:formatCode>
+                <c:ptCount val="3"/>
+                <c:pt idx="0">
+                  <c:v>1200</c:v>
+                </c:pt>
+                <c:pt idx="1">
+                  <c:v>900.5</c:v>
+                </c:pt>
+                <c:pt idx="2">
+                  <c:v>430</c:v>
+                </c:pt>
+              </c:numCache>
+            </c:numRef>
+          </c:val>
+        </c:ser>
+        <c:ser>
+          <c:idx val="1"/>
+          <c:order val="1"/>
+          <c:tx>
+            <c:strRef>
+              <c:f>Sheet1!$C$1</c:f>
+              <c:strCache>
+                <c:ptCount val="1"/>
+                <c:pt idx="0">
+                  <c:v>2024</c:v>
+                </c:pt>
+              </c:strCache>
+            </c:strRef>
+          </c:tx>
+          <c:cat>
+            <c:strRef>
+              <c:f>Sheet1!$A$2:$A$4</c:f>
+              <c:strCache>
+                <c:ptCount val="3"/>
+                <c:pt idx="0">
+                  <c:v>North</c:v>
+                </c:pt>
+                <c:pt idx="1">
+                  <c:v>South</c:v>
+                </c:pt>
+                <c:pt idx="2">
+                  <c:v>East</c:v>
+                </c:pt>
+              </c:strCache>
+            </c:strRef>
+          </c:cat>
+          <c:val>
+            <c:numRef>
+              <c:f>Sheet1!$C$2:$C$4</c:f>
+              <c:numCache>
+                <c:formatCode>General</c:formatCode>
+                <c:ptCount val="3"/>
+                <c:pt idx="0">
+                  <c:v>1350</c:v>
+                </c:pt>
+                <c:pt idx="1">
+                  <c:v>880</c:v>
+                </c:pt>
+                <c:pt idx="2">
+                  <c:v>510.25</c:v>
+                </c:pt>
+              </c:numCache>
+            </c:numRef>
+          </c:val>
+        </c:ser>
+        <c:axId val="111"/>
+        <c:axId val="222"/>
+      </c:barChart>
+      <c:catAx>
+        <c:axId val="111"/>
+        <c:scaling/>
+        <c:delete val="0"/>
+        <c:axPos val="b"/>
+        <c:crossAx val="222"/>
+      </c:catAx>
+      <c:valAx>
+        <c:axId val="222"/>
+        <c:scaling/>
+        <c:delete val="0"/>
+        <c:axPos val="l"/>
+        <c:crossAx val="111"/>
+      </c:valAx>
+    </c:plotArea>
+  </c:chart>
+</c:chartSpace>
 </file>
 
 <file path=ppt/slides/slide1.xml><?xml version="1.0" encoding="utf-8"?>
@@ -586,7 +841,7 @@
           <p:nvPr/>
         </p:nvPicPr>
         <p:blipFill>
-          <a:blip xmlns:r="http://schemas.openxmlformats.org/officeDocument/2006/relationships" xmlns:a="http://schemas.openxmlformats.org/drawingml/2006/main" r:embed="R56a36f2afb7a4fcb"/>
+          <a:blip xmlns:r="http://schemas.openxmlformats.org/officeDocument/2006/relationships" xmlns:a="http://schemas.openxmlformats.org/drawingml/2006/main" r:embed="R6b7ccd47466442e3"/>
           <a:stretch xmlns:a="http://schemas.openxmlformats.org/drawingml/2006/main">
             <a:fillRect/>
           </a:stretch>
@@ -722,6 +977,154 @@
           </a:p>
         </p:txBody>
       </p:sp>
+    </p:spTree>
+  </p:cSld>
+</p:sld>
+</file>
+
+<file path=ppt/slides/slide6.xml><?xml version="1.0" encoding="utf-8"?>
+<p:sld xmlns:p="http://schemas.openxmlformats.org/presentationml/2006/main">
+  <p:cSld>
+    <p:spTree>
+      <p:nvGrpSpPr>
+        <p:cNvPr id="1" name=""/>
+        <p:cNvGrpSpPr/>
+        <p:nvPr/>
+      </p:nvGrpSpPr>
+      <p:grpSpPr>
+        <a:xfrm xmlns:a="http://schemas.openxmlformats.org/drawingml/2006/main"/>
+      </p:grpSpPr>
+      <p:sp>
+        <p:nvSpPr>
+          <p:cNvPr id="2" name="Title"/>
+          <p:cNvSpPr>
+            <a:spLocks xmlns:a="http://schemas.openxmlformats.org/drawingml/2006/main" noGrp="1"/>
+          </p:cNvSpPr>
+          <p:nvPr>
+            <p:ph type="title"/>
+          </p:nvPr>
+        </p:nvSpPr>
+        <p:spPr>
+          <a:xfrm xmlns:a="http://schemas.openxmlformats.org/drawingml/2006/main">
+            <a:off x="0" y="0"/>
+            <a:ext cx="8000000" cy="800000"/>
+          </a:xfrm>
+        </p:spPr>
+        <p:txBody>
+          <a:bodyPr xmlns:a="http://schemas.openxmlformats.org/drawingml/2006/main"/>
+          <a:lstStyle xmlns:a="http://schemas.openxmlformats.org/drawingml/2006/main"/>
+          <a:p xmlns:a="http://schemas.openxmlformats.org/drawingml/2006/main">
+            <a:r>
+              <a:rPr lang="en-US"/>
+              <a:t>Chart and </a:t>
+            </a:r>
+            <a:br/>
+            <a:r>
+              <a:rPr lang="en-US"/>
+              <a:t>diagram</a:t>
+            </a:r>
+          </a:p>
+        </p:txBody>
+      </p:sp>
+      <p:sp>
+        <p:nvSpPr>
+          <p:cNvPr id="3" name="Link"/>
+          <p:cNvSpPr txBox="1">
+            <a:spLocks xmlns:a="http://schemas.openxmlformats.org/drawingml/2006/main" noGrp="1"/>
+          </p:cNvSpPr>
+          <p:nvPr/>
+        </p:nvSpPr>
+        <p:spPr>
+          <a:xfrm xmlns:a="http://schemas.openxmlformats.org/drawingml/2006/main">
+            <a:off x="0" y="1000000"/>
+            <a:ext cx="3500000" cy="600000"/>
+          </a:xfrm>
+        </p:spPr>
+        <p:txBody>
+          <a:bodyPr xmlns:a="http://schemas.openxmlformats.org/drawingml/2006/main"/>
+          <a:lstStyle xmlns:a="http://schemas.openxmlformats.org/drawingml/2006/main"/>
+          <a:p xmlns:a="http://schemas.openxmlformats.org/drawingml/2006/main">
+            <a:r>
+              <a:rPr lang="en-US">
+                <a:hlinkClick xmlns:r="http://schemas.openxmlformats.org/officeDocument/2006/relationships" r:id="Rdd63ba910a12429f"/>
+              </a:rPr>
+              <a:t>Read the plan</a:t>
+            </a:r>
+          </a:p>
+        </p:txBody>
+      </p:sp>
+      <p:sp>
+        <p:nvSpPr>
+          <p:cNvPr id="4" name="Indented"/>
+          <p:cNvSpPr txBox="1">
+            <a:spLocks xmlns:a="http://schemas.openxmlformats.org/drawingml/2006/main" noGrp="1"/>
+          </p:cNvSpPr>
+          <p:nvPr/>
+        </p:nvSpPr>
+        <p:spPr>
+          <a:xfrm xmlns:a="http://schemas.openxmlformats.org/drawingml/2006/main">
+            <a:off x="4000000" y="1000000"/>
+            <a:ext cx="3500000" cy="600000"/>
+          </a:xfrm>
+        </p:spPr>
+        <p:txBody>
+          <a:bodyPr xmlns:a="http://schemas.openxmlformats.org/drawingml/2006/main"/>
+          <a:lstStyle xmlns:a="http://schemas.openxmlformats.org/drawingml/2006/main"/>
+          <a:p xmlns:a="http://schemas.openxmlformats.org/drawingml/2006/main">
+            <a:pPr lvl="1"/>
+            <a:r>
+              <a:rPr lang="en-US"/>
+              <a:t>Child one</a:t>
+            </a:r>
+          </a:p>
+          <a:p xmlns:a="http://schemas.openxmlformats.org/drawingml/2006/main">
+            <a:pPr lvl="1"/>
+            <a:r>
+              <a:rPr lang="en-US"/>
+              <a:t>Child two</a:t>
+            </a:r>
+          </a:p>
+          <a:p xmlns:a="http://schemas.openxmlformats.org/drawingml/2006/main">
+            <a:pPr lvl="2"/>
+            <a:r>
+              <a:rPr lang="en-US"/>
+              <a:t>Grandchild</a:t>
+            </a:r>
+          </a:p>
+        </p:txBody>
+      </p:sp>
+      <p:graphicFrame>
+        <p:nvGraphicFramePr>
+          <p:cNvPr id="5" name="Chart"/>
+          <p:cNvGraphicFramePr/>
+          <p:nvPr/>
+        </p:nvGraphicFramePr>
+        <p:xfrm>
+          <a:off xmlns:a="http://schemas.openxmlformats.org/drawingml/2006/main" x="0" y="2000000"/>
+          <a:ext xmlns:a="http://schemas.openxmlformats.org/drawingml/2006/main" cx="6000000" cy="1800000"/>
+        </p:xfrm>
+        <a:graphic xmlns:a="http://schemas.openxmlformats.org/drawingml/2006/main">
+          <a:graphicData uri="http://schemas.openxmlformats.org/drawingml/2006/chart">
+            <c:chart xmlns:r="http://schemas.openxmlformats.org/officeDocument/2006/relationships" xmlns:c="http://schemas.openxmlformats.org/drawingml/2006/chart" r:id="R0651fc9058e4471c"/>
+          </a:graphicData>
+        </a:graphic>
+      </p:graphicFrame>
+      <p:graphicFrame>
+        <p:nvGraphicFramePr>
+          <p:cNvPr id="6" name="Diagram"/>
+          <p:cNvGraphicFramePr/>
+          <p:nvPr/>
+        </p:nvGraphicFramePr>
+        <p:xfrm>
+          <a:off xmlns:a="http://schemas.openxmlformats.org/drawingml/2006/main" x="0" y="4000000"/>
+          <a:ext xmlns:a="http://schemas.openxmlformats.org/drawingml/2006/main" cx="6000000" cy="1800000"/>
+        </p:xfrm>
+        <a:graphic xmlns:a="http://schemas.openxmlformats.org/drawingml/2006/main">
+          <a:graphicData uri="http://schemas.openxmlformats.org/drawingml/2006/diagram">
+            <dgm:relIds xmlns:r="http://schemas.openxmlformats.org/officeDocument/2006/relationships" xmlns:dgm="http://schemas.openxmlformats.org/drawingml/2006/diagram" r:dm="R6b6253bafcb042c0" r:lo="R3c1dc17bb44e4681" r:qs="R1fd84005f5934666" r:cs="R32bbde31e0ef48e4"/>
+          </a:graphicData>
+        </a:graphic>
+      </p:graphicFrame>
     </p:spTree>
   </p:cSld>
 </p:sld>

--- a/Dev/Caret.ConverterTests/samples/powerpoint-review.pptx
+++ b/Dev/Caret.ConverterTests/samples/powerpoint-review.pptx
@@ -2,18 +2,18 @@
 <file path=ppt/presentation.xml><?xml version="1.0" encoding="utf-8"?>
 <p:presentation xmlns:p="http://schemas.openxmlformats.org/presentationml/2006/main">
   <p:sldMasterIdLst>
-    <p:sldMasterId xmlns:r="http://schemas.openxmlformats.org/officeDocument/2006/relationships" id="2147483648" r:id="Rc62b4103cfd345b8"/>
+    <p:sldMasterId xmlns:r="http://schemas.openxmlformats.org/officeDocument/2006/relationships" id="2147483648" r:id="R1677969e7c474d4a"/>
   </p:sldMasterIdLst>
   <p:notesMasterIdLst>
-    <p:notesMasterId xmlns:r="http://schemas.openxmlformats.org/officeDocument/2006/relationships" r:id="R724e0d88e9d547d4"/>
+    <p:notesMasterId xmlns:r="http://schemas.openxmlformats.org/officeDocument/2006/relationships" r:id="Rb0e13d4e16f240fc"/>
   </p:notesMasterIdLst>
   <p:sldIdLst>
-    <p:sldId xmlns:r="http://schemas.openxmlformats.org/officeDocument/2006/relationships" id="256" r:id="R37f0fc27ebf148c7"/>
-    <p:sldId xmlns:r="http://schemas.openxmlformats.org/officeDocument/2006/relationships" id="257" r:id="R92b3d39ae7ab47a4"/>
-    <p:sldId xmlns:r="http://schemas.openxmlformats.org/officeDocument/2006/relationships" id="258" r:id="Rf518078800b54c18"/>
-    <p:sldId xmlns:r="http://schemas.openxmlformats.org/officeDocument/2006/relationships" id="259" r:id="Rbe08440b5cef47f1"/>
-    <p:sldId xmlns:r="http://schemas.openxmlformats.org/officeDocument/2006/relationships" id="260" r:id="Re33e7e96d9a048d6"/>
-    <p:sldId xmlns:r="http://schemas.openxmlformats.org/officeDocument/2006/relationships" id="261" r:id="R4c119e7d279048f2"/>
+    <p:sldId xmlns:r="http://schemas.openxmlformats.org/officeDocument/2006/relationships" id="256" r:id="R9738f064f1a94dc4"/>
+    <p:sldId xmlns:r="http://schemas.openxmlformats.org/officeDocument/2006/relationships" id="257" r:id="Ref4840f9a6c646f5"/>
+    <p:sldId xmlns:r="http://schemas.openxmlformats.org/officeDocument/2006/relationships" id="258" r:id="R8f080f08fa894845"/>
+    <p:sldId xmlns:r="http://schemas.openxmlformats.org/officeDocument/2006/relationships" id="259" r:id="R2123936b9643432f"/>
+    <p:sldId xmlns:r="http://schemas.openxmlformats.org/officeDocument/2006/relationships" id="260" r:id="R11f34b3de04b47c2"/>
+    <p:sldId xmlns:r="http://schemas.openxmlformats.org/officeDocument/2006/relationships" id="261" r:id="R9a852bbba82d45ce"/>
   </p:sldIdLst>
   <p:sldSz cx="9144000" cy="6858000" type="screen4x3"/>
   <p:notesSz cx="6858000" cy="9144000"/>
@@ -341,7 +341,7 @@
   </p:cSld>
   <p:clrMap bg1="lt1" tx1="dk1" bg2="lt2" tx2="dk2" accent1="accent1" accent2="accent2" accent3="accent3" accent4="accent4" accent5="accent5" accent6="accent6" hlink="hlink" folHlink="folHlink"/>
   <p:sldLayoutIdLst>
-    <p:sldLayoutId xmlns:r="http://schemas.openxmlformats.org/officeDocument/2006/relationships" id="2147483649" r:id="R6bb53151cbb84a5a"/>
+    <p:sldLayoutId xmlns:r="http://schemas.openxmlformats.org/officeDocument/2006/relationships" id="2147483649" r:id="Ra12674b5652d4a53"/>
   </p:sldLayoutIdLst>
 </p:sldMaster>
 </file>
@@ -482,6 +482,163 @@
         <c:scaling/>
         <c:delete val="0"/>
         <c:axPos val="l"/>
+        <c:title>
+          <c:tx>
+            <c:rich>
+              <a:bodyPr xmlns:a="http://schemas.openxmlformats.org/drawingml/2006/main"/>
+              <a:lstStyle xmlns:a="http://schemas.openxmlformats.org/drawingml/2006/main"/>
+              <a:p xmlns:a="http://schemas.openxmlformats.org/drawingml/2006/main">
+                <a:r>
+                  <a:t>Revenue (USD)</a:t>
+                </a:r>
+              </a:p>
+            </c:rich>
+          </c:tx>
+        </c:title>
+        <c:crossAx val="111"/>
+      </c:valAx>
+    </c:plotArea>
+  </c:chart>
+</c:chartSpace>
+</file>
+
+<file path=ppt/slides/charts/chart2.xml><?xml version="1.0" encoding="utf-8"?>
+<c:chartSpace xmlns:c="http://schemas.openxmlformats.org/drawingml/2006/chart">
+  <c:chart>
+    <c:autoTitleDeleted val="1"/>
+    <c:plotArea>
+      <c:layout/>
+      <c:barChart>
+        <c:barDir val="col"/>
+        <c:grouping val="clustered"/>
+        <c:ser>
+          <c:idx val="0"/>
+          <c:order val="0"/>
+          <c:tx>
+            <c:strRef>
+              <c:f>Sheet1!$B$1</c:f>
+              <c:strCache>
+                <c:ptCount val="1"/>
+                <c:pt idx="0">
+                  <c:v>2023</c:v>
+                </c:pt>
+              </c:strCache>
+            </c:strRef>
+          </c:tx>
+          <c:cat>
+            <c:strRef>
+              <c:f>Sheet1!$A$2:$A$4</c:f>
+              <c:strCache>
+                <c:ptCount val="3"/>
+                <c:pt idx="0">
+                  <c:v>North</c:v>
+                </c:pt>
+                <c:pt idx="1">
+                  <c:v>South</c:v>
+                </c:pt>
+                <c:pt idx="2">
+                  <c:v>East</c:v>
+                </c:pt>
+              </c:strCache>
+            </c:strRef>
+          </c:cat>
+          <c:val>
+            <c:numRef>
+              <c:f>Sheet1!$B$2:$B$4</c:f>
+              <c:numCache>
+                <c:formatCode>General</c:formatCode>
+                <c:ptCount val="3"/>
+                <c:pt idx="0">
+                  <c:v>1200</c:v>
+                </c:pt>
+                <c:pt idx="1">
+                  <c:v>900.5</c:v>
+                </c:pt>
+                <c:pt idx="2">
+                  <c:v>430</c:v>
+                </c:pt>
+              </c:numCache>
+            </c:numRef>
+          </c:val>
+        </c:ser>
+        <c:ser>
+          <c:idx val="1"/>
+          <c:order val="1"/>
+          <c:tx>
+            <c:strRef>
+              <c:f>Sheet1!$C$1</c:f>
+              <c:strCache>
+                <c:ptCount val="1"/>
+                <c:pt idx="0">
+                  <c:v>2024</c:v>
+                </c:pt>
+              </c:strCache>
+            </c:strRef>
+          </c:tx>
+          <c:cat>
+            <c:strRef>
+              <c:f>Sheet1!$A$2:$A$4</c:f>
+              <c:strCache>
+                <c:ptCount val="3"/>
+                <c:pt idx="0">
+                  <c:v>North</c:v>
+                </c:pt>
+                <c:pt idx="1">
+                  <c:v>South</c:v>
+                </c:pt>
+                <c:pt idx="2">
+                  <c:v>East</c:v>
+                </c:pt>
+              </c:strCache>
+            </c:strRef>
+          </c:cat>
+          <c:val>
+            <c:numRef>
+              <c:f>Sheet1!$C$2:$C$4</c:f>
+              <c:numCache>
+                <c:formatCode>General</c:formatCode>
+                <c:ptCount val="3"/>
+                <c:pt idx="0">
+                  <c:v>1350</c:v>
+                </c:pt>
+                <c:pt idx="1">
+                  <c:v>880</c:v>
+                </c:pt>
+                <c:pt idx="2">
+                  <c:v>510.25</c:v>
+                </c:pt>
+              </c:numCache>
+            </c:numRef>
+          </c:val>
+        </c:ser>
+        <c:axId val="111"/>
+        <c:axId val="222"/>
+      </c:barChart>
+      <c:catAx>
+        <c:axId val="111"/>
+        <c:scaling/>
+        <c:delete val="0"/>
+        <c:axPos val="b"/>
+        <c:crossAx val="222"/>
+      </c:catAx>
+      <c:valAx>
+        <c:axId val="222"/>
+        <c:scaling/>
+        <c:delete val="0"/>
+        <c:axPos val="l"/>
+        <c:title>
+          <c:tx>
+            <c:rich>
+              <a:bodyPr xmlns:a="http://schemas.openxmlformats.org/drawingml/2006/main"/>
+              <a:lstStyle xmlns:a="http://schemas.openxmlformats.org/drawingml/2006/main"/>
+              <a:p xmlns:a="http://schemas.openxmlformats.org/drawingml/2006/main">
+                <a:r>
+                  <a:t>Revenue (USD)</a:t>
+                </a:r>
+              </a:p>
+            </c:rich>
+          </c:tx>
+        </c:title>
         <c:crossAx val="111"/>
       </c:valAx>
     </c:plotArea>
@@ -841,7 +998,7 @@
           <p:nvPr/>
         </p:nvPicPr>
         <p:blipFill>
-          <a:blip xmlns:r="http://schemas.openxmlformats.org/officeDocument/2006/relationships" xmlns:a="http://schemas.openxmlformats.org/drawingml/2006/main" r:embed="R6b7ccd47466442e3"/>
+          <a:blip xmlns:r="http://schemas.openxmlformats.org/officeDocument/2006/relationships" xmlns:a="http://schemas.openxmlformats.org/drawingml/2006/main" r:embed="R039e8bcf2a8540c9"/>
           <a:stretch xmlns:a="http://schemas.openxmlformats.org/drawingml/2006/main">
             <a:fillRect/>
           </a:stretch>
@@ -1046,7 +1203,7 @@
           <a:p xmlns:a="http://schemas.openxmlformats.org/drawingml/2006/main">
             <a:r>
               <a:rPr lang="en-US">
-                <a:hlinkClick xmlns:r="http://schemas.openxmlformats.org/officeDocument/2006/relationships" r:id="Rdd63ba910a12429f"/>
+                <a:hlinkClick xmlns:r="http://schemas.openxmlformats.org/officeDocument/2006/relationships" r:id="R410d33b841f64bb3"/>
               </a:rPr>
               <a:t>Read the plan</a:t>
             </a:r>
@@ -1105,7 +1262,23 @@
         </p:xfrm>
         <a:graphic xmlns:a="http://schemas.openxmlformats.org/drawingml/2006/main">
           <a:graphicData uri="http://schemas.openxmlformats.org/drawingml/2006/chart">
-            <c:chart xmlns:r="http://schemas.openxmlformats.org/officeDocument/2006/relationships" xmlns:c="http://schemas.openxmlformats.org/drawingml/2006/chart" r:id="R0651fc9058e4471c"/>
+            <c:chart xmlns:r="http://schemas.openxmlformats.org/officeDocument/2006/relationships" xmlns:c="http://schemas.openxmlformats.org/drawingml/2006/chart" r:id="Rea14b18b14114bd0"/>
+          </a:graphicData>
+        </a:graphic>
+      </p:graphicFrame>
+      <p:graphicFrame>
+        <p:nvGraphicFramePr>
+          <p:cNvPr id="7" name="Chart"/>
+          <p:cNvGraphicFramePr/>
+          <p:nvPr/>
+        </p:nvGraphicFramePr>
+        <p:xfrm>
+          <a:off xmlns:a="http://schemas.openxmlformats.org/drawingml/2006/main" x="0" y="3000000"/>
+          <a:ext xmlns:a="http://schemas.openxmlformats.org/drawingml/2006/main" cx="6000000" cy="1800000"/>
+        </p:xfrm>
+        <a:graphic xmlns:a="http://schemas.openxmlformats.org/drawingml/2006/main">
+          <a:graphicData uri="http://schemas.openxmlformats.org/drawingml/2006/chart">
+            <c:chart xmlns:r="http://schemas.openxmlformats.org/officeDocument/2006/relationships" xmlns:c="http://schemas.openxmlformats.org/drawingml/2006/chart" r:id="Rca82acb8b2b946ec"/>
           </a:graphicData>
         </a:graphic>
       </p:graphicFrame>
@@ -1121,7 +1294,7 @@
         </p:xfrm>
         <a:graphic xmlns:a="http://schemas.openxmlformats.org/drawingml/2006/main">
           <a:graphicData uri="http://schemas.openxmlformats.org/drawingml/2006/diagram">
-            <dgm:relIds xmlns:r="http://schemas.openxmlformats.org/officeDocument/2006/relationships" xmlns:dgm="http://schemas.openxmlformats.org/drawingml/2006/diagram" r:dm="R6b6253bafcb042c0" r:lo="R3c1dc17bb44e4681" r:qs="R1fd84005f5934666" r:cs="R32bbde31e0ef48e4"/>
+            <dgm:relIds xmlns:r="http://schemas.openxmlformats.org/officeDocument/2006/relationships" xmlns:dgm="http://schemas.openxmlformats.org/drawingml/2006/diagram" r:dm="Rcd5ed0c975ed4930" r:lo="R7e78b047517a48de" r:qs="R1ab56774b1134a8c" r:cs="R4bdee313fec342ce"/>
           </a:graphicData>
         </a:graphic>
       </p:graphicFrame>
